--- a/controller/NNMEC/Readme4PythonNNMEC.pptx
+++ b/controller/NNMEC/Readme4PythonNNMEC.pptx
@@ -6443,6 +6443,13 @@
             <a:endParaRPr kumimoji="1" lang="en-US" altLang="ja-JP" dirty="0"/>
           </a:p>
           <a:p>
+            <a:pPr marL="989838" lvl="2" indent="-514350">
+              <a:buFont typeface="+mj-lt"/>
+              <a:buAutoNum type="arabicPeriod" startAt="3"/>
+            </a:pPr>
+            <a:endParaRPr kumimoji="1" lang="en-US" altLang="ja-JP" dirty="0"/>
+          </a:p>
+          <a:p>
             <a:pPr marL="514350" indent="-514350">
               <a:buFont typeface="+mj-lt"/>
               <a:buAutoNum type="arabicPeriod" startAt="4"/>
@@ -6802,7 +6809,96 @@
         </p:nvSpPr>
         <p:spPr>
           <a:xfrm>
-            <a:off x="949295" y="3913516"/>
+            <a:off x="949295" y="3858615"/>
+            <a:ext cx="3443411" cy="646331"/>
+          </a:xfrm>
+          <a:prstGeom prst="rect">
+            <a:avLst/>
+          </a:prstGeom>
+          <a:solidFill>
+            <a:schemeClr val="bg1">
+              <a:lumMod val="95000"/>
+            </a:schemeClr>
+          </a:solidFill>
+          <a:ln>
+            <a:solidFill>
+              <a:schemeClr val="tx1"/>
+            </a:solidFill>
+          </a:ln>
+        </p:spPr>
+        <p:style>
+          <a:lnRef idx="2">
+            <a:schemeClr val="accent1">
+              <a:shade val="15000"/>
+            </a:schemeClr>
+          </a:lnRef>
+          <a:fillRef idx="1">
+            <a:schemeClr val="accent1"/>
+          </a:fillRef>
+          <a:effectRef idx="0">
+            <a:schemeClr val="accent1"/>
+          </a:effectRef>
+          <a:fontRef idx="minor">
+            <a:schemeClr val="lt1"/>
+          </a:fontRef>
+        </p:style>
+        <p:txBody>
+          <a:bodyPr wrap="square" rtlCol="0" anchor="ctr">
+            <a:spAutoFit/>
+          </a:bodyPr>
+          <a:lstStyle/>
+          <a:p>
+            <a:pPr algn="ctr"/>
+            <a:r>
+              <a:rPr kumimoji="1" lang="en-US" altLang="ja-JP" dirty="0">
+                <a:solidFill>
+                  <a:sysClr val="windowText" lastClr="000000"/>
+                </a:solidFill>
+              </a:rPr>
+              <a:t>pip install torch</a:t>
+            </a:r>
+          </a:p>
+          <a:p>
+            <a:pPr algn="ctr"/>
+            <a:r>
+              <a:rPr kumimoji="1" lang="en-US" altLang="ja-JP" dirty="0">
+                <a:solidFill>
+                  <a:sysClr val="windowText" lastClr="000000"/>
+                </a:solidFill>
+              </a:rPr>
+              <a:t>pip install </a:t>
+            </a:r>
+            <a:r>
+              <a:rPr kumimoji="1" lang="en-US" altLang="ja-JP" dirty="0" err="1">
+                <a:solidFill>
+                  <a:sysClr val="windowText" lastClr="000000"/>
+                </a:solidFill>
+              </a:rPr>
+              <a:t>numpy</a:t>
+            </a:r>
+            <a:endParaRPr kumimoji="1" lang="ja-JP" altLang="en-US" dirty="0">
+              <a:solidFill>
+                <a:sysClr val="windowText" lastClr="000000"/>
+              </a:solidFill>
+            </a:endParaRPr>
+          </a:p>
+        </p:txBody>
+      </p:sp>
+      <p:sp>
+        <p:nvSpPr>
+          <p:cNvPr id="16" name="正方形/長方形 15">
+            <a:extLst>
+              <a:ext uri="{FF2B5EF4-FFF2-40B4-BE49-F238E27FC236}">
+                <a16:creationId xmlns:a16="http://schemas.microsoft.com/office/drawing/2014/main" id="{2857F7D7-D10C-F1A3-18D2-4525960471DE}"/>
+              </a:ext>
+            </a:extLst>
+          </p:cNvPr>
+          <p:cNvSpPr/>
+          <p:nvPr/>
+        </p:nvSpPr>
+        <p:spPr>
+          <a:xfrm>
+            <a:off x="949295" y="5657847"/>
             <a:ext cx="3443411" cy="369332"/>
           </a:xfrm>
           <a:prstGeom prst="rect">
@@ -6848,84 +6944,6 @@
                   <a:sysClr val="windowText" lastClr="000000"/>
                 </a:solidFill>
               </a:rPr>
-              <a:t>pip install torch </a:t>
-            </a:r>
-            <a:r>
-              <a:rPr kumimoji="1" lang="en-US" altLang="ja-JP" dirty="0" err="1">
-                <a:solidFill>
-                  <a:sysClr val="windowText" lastClr="000000"/>
-                </a:solidFill>
-              </a:rPr>
-              <a:t>numpy</a:t>
-            </a:r>
-            <a:endParaRPr kumimoji="1" lang="ja-JP" altLang="en-US" dirty="0">
-              <a:solidFill>
-                <a:sysClr val="windowText" lastClr="000000"/>
-              </a:solidFill>
-            </a:endParaRPr>
-          </a:p>
-        </p:txBody>
-      </p:sp>
-      <p:sp>
-        <p:nvSpPr>
-          <p:cNvPr id="16" name="正方形/長方形 15">
-            <a:extLst>
-              <a:ext uri="{FF2B5EF4-FFF2-40B4-BE49-F238E27FC236}">
-                <a16:creationId xmlns:a16="http://schemas.microsoft.com/office/drawing/2014/main" id="{2857F7D7-D10C-F1A3-18D2-4525960471DE}"/>
-              </a:ext>
-            </a:extLst>
-          </p:cNvPr>
-          <p:cNvSpPr/>
-          <p:nvPr/>
-        </p:nvSpPr>
-        <p:spPr>
-          <a:xfrm>
-            <a:off x="949295" y="5404033"/>
-            <a:ext cx="3443411" cy="369332"/>
-          </a:xfrm>
-          <a:prstGeom prst="rect">
-            <a:avLst/>
-          </a:prstGeom>
-          <a:solidFill>
-            <a:schemeClr val="bg1">
-              <a:lumMod val="95000"/>
-            </a:schemeClr>
-          </a:solidFill>
-          <a:ln>
-            <a:solidFill>
-              <a:schemeClr val="tx1"/>
-            </a:solidFill>
-          </a:ln>
-        </p:spPr>
-        <p:style>
-          <a:lnRef idx="2">
-            <a:schemeClr val="accent1">
-              <a:shade val="15000"/>
-            </a:schemeClr>
-          </a:lnRef>
-          <a:fillRef idx="1">
-            <a:schemeClr val="accent1"/>
-          </a:fillRef>
-          <a:effectRef idx="0">
-            <a:schemeClr val="accent1"/>
-          </a:effectRef>
-          <a:fontRef idx="minor">
-            <a:schemeClr val="lt1"/>
-          </a:fontRef>
-        </p:style>
-        <p:txBody>
-          <a:bodyPr wrap="square" rtlCol="0" anchor="ctr">
-            <a:spAutoFit/>
-          </a:bodyPr>
-          <a:lstStyle/>
-          <a:p>
-            <a:pPr algn="ctr"/>
-            <a:r>
-              <a:rPr kumimoji="1" lang="en-US" altLang="ja-JP" dirty="0">
-                <a:solidFill>
-                  <a:sysClr val="windowText" lastClr="000000"/>
-                </a:solidFill>
-              </a:rPr>
               <a:t>pip freeze</a:t>
             </a:r>
             <a:endParaRPr kumimoji="1" lang="ja-JP" altLang="en-US" dirty="0">
@@ -7058,7 +7076,7 @@
         </p:nvSpPr>
         <p:spPr>
           <a:xfrm>
-            <a:off x="4966347" y="5063290"/>
+            <a:off x="4966347" y="5317104"/>
             <a:ext cx="1909482" cy="369332"/>
           </a:xfrm>
           <a:prstGeom prst="rect">
@@ -7314,7 +7332,7 @@
         </p:nvGrpSpPr>
         <p:grpSpPr>
           <a:xfrm>
-            <a:off x="4166732" y="3986426"/>
+            <a:off x="4166732" y="3916365"/>
             <a:ext cx="161109" cy="223511"/>
             <a:chOff x="10241280" y="1271451"/>
             <a:chExt cx="618308" cy="857795"/>
@@ -7431,7 +7449,7 @@
         </p:nvGrpSpPr>
         <p:grpSpPr>
           <a:xfrm>
-            <a:off x="4166732" y="5480239"/>
+            <a:off x="4166732" y="5734053"/>
             <a:ext cx="161109" cy="223511"/>
             <a:chOff x="10241280" y="1271451"/>
             <a:chExt cx="618308" cy="857795"/>
@@ -7592,7 +7610,7 @@
         </p:nvSpPr>
         <p:spPr>
           <a:xfrm>
-            <a:off x="955545" y="3541628"/>
+            <a:off x="955545" y="3489283"/>
             <a:ext cx="1092006" cy="369332"/>
           </a:xfrm>
           <a:prstGeom prst="rect">
@@ -7636,7 +7654,7 @@
         </p:nvSpPr>
         <p:spPr>
           <a:xfrm>
-            <a:off x="955545" y="5032145"/>
+            <a:off x="955545" y="5285959"/>
             <a:ext cx="1092006" cy="369332"/>
           </a:xfrm>
           <a:prstGeom prst="rect">
@@ -8289,15 +8307,6 @@
 </file>
 
 <file path=customXml/item2.xml><?xml version="1.0" encoding="utf-8"?>
-<?mso-contentType ?>
-<FormTemplates xmlns="http://schemas.microsoft.com/sharepoint/v3/contenttype/forms">
-  <Display>DocumentLibraryForm</Display>
-  <Edit>DocumentLibraryForm</Edit>
-  <New>DocumentLibraryForm</New>
-</FormTemplates>
-</file>
-
-<file path=customXml/item3.xml><?xml version="1.0" encoding="utf-8"?>
 <ct:contentTypeSchema xmlns:ct="http://schemas.microsoft.com/office/2006/metadata/contentType" xmlns:ma="http://schemas.microsoft.com/office/2006/metadata/properties/metaAttributes" ct:_="" ma:_="" ma:contentTypeName="ドキュメント" ma:contentTypeID="0x010100F0BF34DA9A9AB14A9F7AC31FBE37F9E5" ma:contentTypeVersion="16" ma:contentTypeDescription="新しいドキュメントを作成します。" ma:contentTypeScope="" ma:versionID="32dd7207e8140c2c126537d3c2fd37c5">
   <xsd:schema xmlns:xsd="http://www.w3.org/2001/XMLSchema" xmlns:xs="http://www.w3.org/2001/XMLSchema" xmlns:p="http://schemas.microsoft.com/office/2006/metadata/properties" xmlns:ns2="7423ae4f-c4e8-48bd-a156-3a6ed64ee840" xmlns:ns3="2fc92963-ec3a-4730-8ea3-7221b6caf362" targetNamespace="http://schemas.microsoft.com/office/2006/metadata/properties" ma:root="true" ma:fieldsID="f3879058c32170438aed5fb3d384d5ad" ns2:_="" ns3:_="">
     <xsd:import namespace="7423ae4f-c4e8-48bd-a156-3a6ed64ee840"/>
@@ -8538,6 +8547,15 @@
 </ct:contentTypeSchema>
 </file>
 
+<file path=customXml/item3.xml><?xml version="1.0" encoding="utf-8"?>
+<?mso-contentType ?>
+<FormTemplates xmlns="http://schemas.microsoft.com/sharepoint/v3/contenttype/forms">
+  <Display>DocumentLibraryForm</Display>
+  <Edit>DocumentLibraryForm</Edit>
+  <New>DocumentLibraryForm</New>
+</FormTemplates>
+</file>
+
 <file path=customXml/itemProps1.xml><?xml version="1.0" encoding="utf-8"?>
 <ds:datastoreItem xmlns:ds="http://schemas.openxmlformats.org/officeDocument/2006/customXml" ds:itemID="{F6D09FDB-9868-44A6-A96C-0C66C7078369}">
   <ds:schemaRefs>
@@ -8556,14 +8574,6 @@
 </file>
 
 <file path=customXml/itemProps2.xml><?xml version="1.0" encoding="utf-8"?>
-<ds:datastoreItem xmlns:ds="http://schemas.openxmlformats.org/officeDocument/2006/customXml" ds:itemID="{DBF5F6B8-8CA8-42FC-ABA9-1599493B6861}">
-  <ds:schemaRefs>
-    <ds:schemaRef ds:uri="http://schemas.microsoft.com/sharepoint/v3/contenttype/forms"/>
-  </ds:schemaRefs>
-</ds:datastoreItem>
-</file>
-
-<file path=customXml/itemProps3.xml><?xml version="1.0" encoding="utf-8"?>
 <ds:datastoreItem xmlns:ds="http://schemas.openxmlformats.org/officeDocument/2006/customXml" ds:itemID="{9234AE58-1F37-44BE-8BCC-BD47CBB6D0E8}">
   <ds:schemaRefs>
     <ds:schemaRef ds:uri="http://schemas.microsoft.com/office/2006/metadata/contentType"/>
@@ -8582,6 +8592,14 @@
 </ds:datastoreItem>
 </file>
 
+<file path=customXml/itemProps3.xml><?xml version="1.0" encoding="utf-8"?>
+<ds:datastoreItem xmlns:ds="http://schemas.openxmlformats.org/officeDocument/2006/customXml" ds:itemID="{DBF5F6B8-8CA8-42FC-ABA9-1599493B6861}">
+  <ds:schemaRefs>
+    <ds:schemaRef ds:uri="http://schemas.microsoft.com/sharepoint/v3/contenttype/forms"/>
+  </ds:schemaRefs>
+</ds:datastoreItem>
+</file>
+
 <file path=docMetadata/LabelInfo.xml><?xml version="1.0" encoding="utf-8"?>
 <clbl:labelList xmlns:clbl="http://schemas.microsoft.com/office/2020/mipLabelMetadata">
   <clbl:label id="{46ec3f30-2d4f-4250-82e1-372410d23208}" enabled="0" method="" siteId="{46ec3f30-2d4f-4250-82e1-372410d23208}" removed="1"/>

--- a/controller/NNMEC/Readme4PythonNNMEC.pptx
+++ b/controller/NNMEC/Readme4PythonNNMEC.pptx
@@ -5,13 +5,14 @@
     <p:sldMasterId id="2147483672" r:id="rId4"/>
   </p:sldMasterIdLst>
   <p:notesMasterIdLst>
-    <p:notesMasterId r:id="rId9"/>
+    <p:notesMasterId r:id="rId10"/>
   </p:notesMasterIdLst>
   <p:sldIdLst>
     <p:sldId id="256" r:id="rId5"/>
     <p:sldId id="259" r:id="rId6"/>
     <p:sldId id="257" r:id="rId7"/>
     <p:sldId id="258" r:id="rId8"/>
+    <p:sldId id="260" r:id="rId9"/>
   </p:sldIdLst>
   <p:sldSz cx="12192000" cy="6858000"/>
   <p:notesSz cx="6858000" cy="9144000"/>
@@ -397,7 +398,7 @@
           <a:p>
             <a:fld id="{099CA03D-D818-4553-B191-DD3C8500F17A}" type="datetimeFigureOut">
               <a:rPr kumimoji="1" lang="ja-JP" altLang="en-US" smtClean="0"/>
-              <a:t>2026/7/13</a:t>
+              <a:t>2026/7/21</a:t>
             </a:fld>
             <a:endParaRPr kumimoji="1" lang="ja-JP" altLang="en-US"/>
           </a:p>
@@ -925,7 +926,7 @@
           <a:p>
             <a:fld id="{B90180CF-8FE2-456B-8A9F-257CCAE87B1F}" type="datetime1">
               <a:rPr kumimoji="1" lang="ja-JP" altLang="en-US" smtClean="0"/>
-              <a:t>2026/7/13</a:t>
+              <a:t>2026/7/21</a:t>
             </a:fld>
             <a:endParaRPr kumimoji="1" lang="ja-JP" altLang="en-US"/>
           </a:p>
@@ -1236,7 +1237,7 @@
           <a:p>
             <a:fld id="{B90180CF-8FE2-456B-8A9F-257CCAE87B1F}" type="datetime1">
               <a:rPr kumimoji="1" lang="ja-JP" altLang="en-US" smtClean="0"/>
-              <a:t>2026/7/13</a:t>
+              <a:t>2026/7/21</a:t>
             </a:fld>
             <a:endParaRPr kumimoji="1" lang="ja-JP" altLang="en-US"/>
           </a:p>
@@ -1447,7 +1448,7 @@
           <a:p>
             <a:fld id="{8F934565-9092-4BA3-AD6F-09DA969FA889}" type="datetime1">
               <a:rPr kumimoji="1" lang="ja-JP" altLang="en-US" smtClean="0"/>
-              <a:t>2026/7/13</a:t>
+              <a:t>2026/7/21</a:t>
             </a:fld>
             <a:endParaRPr kumimoji="1" lang="ja-JP" altLang="en-US"/>
           </a:p>
@@ -1724,7 +1725,7 @@
           <a:p>
             <a:fld id="{E1E178D6-BC13-4B05-B82A-3DE852BA502C}" type="datetime1">
               <a:rPr kumimoji="1" lang="ja-JP" altLang="en-US" smtClean="0"/>
-              <a:t>2026/7/13</a:t>
+              <a:t>2026/7/21</a:t>
             </a:fld>
             <a:endParaRPr kumimoji="1" lang="ja-JP" altLang="en-US"/>
           </a:p>
@@ -2003,7 +2004,7 @@
           <a:p>
             <a:fld id="{97938166-345B-4C39-A885-228CE7F191AD}" type="datetime1">
               <a:rPr kumimoji="1" lang="ja-JP" altLang="en-US" smtClean="0"/>
-              <a:t>2026/7/13</a:t>
+              <a:t>2026/7/21</a:t>
             </a:fld>
             <a:endParaRPr kumimoji="1" lang="ja-JP" altLang="en-US"/>
           </a:p>
@@ -2353,7 +2354,7 @@
           <a:p>
             <a:fld id="{944467EF-4991-49C1-86BC-1E5A4BAD4189}" type="datetime1">
               <a:rPr kumimoji="1" lang="ja-JP" altLang="en-US" smtClean="0"/>
-              <a:t>2026/7/13</a:t>
+              <a:t>2026/7/21</a:t>
             </a:fld>
             <a:endParaRPr kumimoji="1" lang="ja-JP" altLang="en-US"/>
           </a:p>
@@ -2528,7 +2529,7 @@
           <a:p>
             <a:fld id="{A46DD47A-5E9C-40BF-856A-F3D6BC3F42A9}" type="datetime1">
               <a:rPr kumimoji="1" lang="ja-JP" altLang="en-US" smtClean="0"/>
-              <a:t>2026/7/13</a:t>
+              <a:t>2026/7/21</a:t>
             </a:fld>
             <a:endParaRPr kumimoji="1" lang="ja-JP" altLang="en-US"/>
           </a:p>
@@ -2918,7 +2919,7 @@
           <a:p>
             <a:fld id="{98AFBE6B-A207-4511-9282-17E206542FA4}" type="datetime1">
               <a:rPr kumimoji="1" lang="ja-JP" altLang="en-US" smtClean="0"/>
-              <a:t>2026/7/13</a:t>
+              <a:t>2026/7/21</a:t>
             </a:fld>
             <a:endParaRPr kumimoji="1" lang="ja-JP" altLang="en-US"/>
           </a:p>
@@ -3300,7 +3301,7 @@
           <a:p>
             <a:fld id="{046030FB-E407-42DE-AAC3-5F48383F7959}" type="datetime1">
               <a:rPr kumimoji="1" lang="ja-JP" altLang="en-US" smtClean="0"/>
-              <a:t>2026/7/13</a:t>
+              <a:t>2026/7/21</a:t>
             </a:fld>
             <a:endParaRPr kumimoji="1" lang="ja-JP" altLang="en-US"/>
           </a:p>
@@ -3623,7 +3624,7 @@
           <a:p>
             <a:fld id="{DF4D11EB-66CE-487B-8E53-0D1CDFF8FB98}" type="datetime1">
               <a:rPr lang="ja-JP" altLang="en-US" smtClean="0"/>
-              <a:t>2026/7/13</a:t>
+              <a:t>2026/7/21</a:t>
             </a:fld>
             <a:endParaRPr lang="ja-JP" altLang="en-US"/>
           </a:p>
@@ -4481,7 +4482,7 @@
           <a:p>
             <a:fld id="{8F934565-9092-4BA3-AD6F-09DA969FA889}" type="datetime1">
               <a:rPr kumimoji="1" lang="ja-JP" altLang="en-US" smtClean="0"/>
-              <a:t>2026/7/13</a:t>
+              <a:t>2026/7/21</a:t>
             </a:fld>
             <a:endParaRPr kumimoji="1" lang="ja-JP" altLang="en-US"/>
           </a:p>
@@ -5346,7 +5347,7 @@
           <a:p>
             <a:fld id="{8F934565-9092-4BA3-AD6F-09DA969FA889}" type="datetime1">
               <a:rPr kumimoji="1" lang="ja-JP" altLang="en-US" smtClean="0"/>
-              <a:t>2026/7/13</a:t>
+              <a:t>2026/7/21</a:t>
             </a:fld>
             <a:endParaRPr kumimoji="1" lang="ja-JP" altLang="en-US"/>
           </a:p>
@@ -6485,7 +6486,7 @@
           <a:p>
             <a:fld id="{8F934565-9092-4BA3-AD6F-09DA969FA889}" type="datetime1">
               <a:rPr kumimoji="1" lang="ja-JP" altLang="en-US" smtClean="0"/>
-              <a:t>2026/7/13</a:t>
+              <a:t>2026/7/21</a:t>
             </a:fld>
             <a:endParaRPr kumimoji="1" lang="ja-JP" altLang="en-US"/>
           </a:p>
@@ -7688,6 +7689,227 @@
     <p:extLst>
       <p:ext uri="{BB962C8B-B14F-4D97-AF65-F5344CB8AC3E}">
         <p14:creationId xmlns:p14="http://schemas.microsoft.com/office/powerpoint/2010/main" val="155504427"/>
+      </p:ext>
+    </p:extLst>
+  </p:cSld>
+  <p:clrMapOvr>
+    <a:masterClrMapping/>
+  </p:clrMapOvr>
+</p:sld>
+</file>
+
+<file path=ppt/slides/slide5.xml><?xml version="1.0" encoding="utf-8"?>
+<p:sld xmlns:a="http://schemas.openxmlformats.org/drawingml/2006/main" xmlns:r="http://schemas.openxmlformats.org/officeDocument/2006/relationships" xmlns:p="http://schemas.openxmlformats.org/presentationml/2006/main">
+  <p:cSld>
+    <p:spTree>
+      <p:nvGrpSpPr>
+        <p:cNvPr id="1" name=""/>
+        <p:cNvGrpSpPr/>
+        <p:nvPr/>
+      </p:nvGrpSpPr>
+      <p:grpSpPr>
+        <a:xfrm>
+          <a:off x="0" y="0"/>
+          <a:ext cx="0" cy="0"/>
+          <a:chOff x="0" y="0"/>
+          <a:chExt cx="0" cy="0"/>
+        </a:xfrm>
+      </p:grpSpPr>
+      <p:sp>
+        <p:nvSpPr>
+          <p:cNvPr id="2" name="タイトル 1">
+            <a:extLst>
+              <a:ext uri="{FF2B5EF4-FFF2-40B4-BE49-F238E27FC236}">
+                <a16:creationId xmlns:a16="http://schemas.microsoft.com/office/drawing/2014/main" id="{001D99D9-F229-58F6-D643-F0BBED20874B}"/>
+              </a:ext>
+            </a:extLst>
+          </p:cNvPr>
+          <p:cNvSpPr>
+            <a:spLocks noGrp="1"/>
+          </p:cNvSpPr>
+          <p:nvPr>
+            <p:ph type="title"/>
+          </p:nvPr>
+        </p:nvSpPr>
+        <p:spPr/>
+        <p:txBody>
+          <a:bodyPr/>
+          <a:lstStyle/>
+          <a:p>
+            <a:r>
+              <a:rPr lang="ja-JP" altLang="en-US" dirty="0"/>
+              <a:t>エラー等が発生した場合</a:t>
+            </a:r>
+            <a:endParaRPr kumimoji="1" lang="ja-JP" altLang="en-US" dirty="0"/>
+          </a:p>
+        </p:txBody>
+      </p:sp>
+      <p:sp>
+        <p:nvSpPr>
+          <p:cNvPr id="3" name="コンテンツ プレースホルダー 2">
+            <a:extLst>
+              <a:ext uri="{FF2B5EF4-FFF2-40B4-BE49-F238E27FC236}">
+                <a16:creationId xmlns:a16="http://schemas.microsoft.com/office/drawing/2014/main" id="{F95A40D3-22E4-719E-5C25-03ECD7F25834}"/>
+              </a:ext>
+            </a:extLst>
+          </p:cNvPr>
+          <p:cNvSpPr>
+            <a:spLocks noGrp="1"/>
+          </p:cNvSpPr>
+          <p:nvPr>
+            <p:ph idx="1"/>
+          </p:nvPr>
+        </p:nvSpPr>
+        <p:spPr/>
+        <p:txBody>
+          <a:bodyPr/>
+          <a:lstStyle/>
+          <a:p>
+            <a:r>
+              <a:rPr kumimoji="1" lang="ja-JP" altLang="en-US" dirty="0"/>
+              <a:t>解決できなそうだと思ったら</a:t>
+            </a:r>
+            <a:br>
+              <a:rPr kumimoji="1" lang="en-US" altLang="ja-JP" dirty="0"/>
+            </a:br>
+            <a:r>
+              <a:rPr kumimoji="1" lang="en-US" altLang="ja-JP" dirty="0" err="1"/>
+              <a:t>common_matlab</a:t>
+            </a:r>
+            <a:r>
+              <a:rPr lang="en-US" altLang="ja-JP" dirty="0"/>
+              <a:t>/</a:t>
+            </a:r>
+            <a:r>
+              <a:rPr lang="en-US" altLang="ja-JP" dirty="0" err="1"/>
+              <a:t>Pythonenv</a:t>
+            </a:r>
+            <a:r>
+              <a:rPr lang="ja-JP" altLang="en-US" dirty="0"/>
+              <a:t>を一度削除しましょう</a:t>
+            </a:r>
+            <a:endParaRPr lang="en-US" altLang="ja-JP" dirty="0"/>
+          </a:p>
+          <a:p>
+            <a:pPr lvl="1"/>
+            <a:r>
+              <a:rPr kumimoji="1" lang="ja-JP" altLang="en-US" dirty="0"/>
+              <a:t>エクスプローラー上でフォルダを削除すれば</a:t>
+            </a:r>
+            <a:r>
+              <a:rPr kumimoji="1" lang="en-US" altLang="ja-JP" dirty="0"/>
+              <a:t>OK</a:t>
+            </a:r>
+            <a:r>
+              <a:rPr kumimoji="1" lang="ja-JP" altLang="en-US" dirty="0"/>
+              <a:t>です。</a:t>
+            </a:r>
+            <a:br>
+              <a:rPr lang="en-US" altLang="ja-JP" dirty="0"/>
+            </a:br>
+            <a:r>
+              <a:rPr lang="ja-JP" altLang="en-US" dirty="0"/>
+              <a:t>その際に</a:t>
+            </a:r>
+            <a:r>
+              <a:rPr lang="en-US" altLang="ja-JP" dirty="0"/>
+              <a:t>MATLAB</a:t>
+            </a:r>
+            <a:r>
+              <a:rPr lang="ja-JP" altLang="en-US" dirty="0"/>
+              <a:t>を閉じていないと削除できないと思います。</a:t>
+            </a:r>
+            <a:endParaRPr kumimoji="1" lang="en-US" altLang="ja-JP" dirty="0"/>
+          </a:p>
+        </p:txBody>
+      </p:sp>
+      <p:sp>
+        <p:nvSpPr>
+          <p:cNvPr id="4" name="日付プレースホルダー 3">
+            <a:extLst>
+              <a:ext uri="{FF2B5EF4-FFF2-40B4-BE49-F238E27FC236}">
+                <a16:creationId xmlns:a16="http://schemas.microsoft.com/office/drawing/2014/main" id="{94DF552B-80F9-D896-9A40-6777500F66A3}"/>
+              </a:ext>
+            </a:extLst>
+          </p:cNvPr>
+          <p:cNvSpPr>
+            <a:spLocks noGrp="1"/>
+          </p:cNvSpPr>
+          <p:nvPr>
+            <p:ph type="dt" sz="half" idx="10"/>
+          </p:nvPr>
+        </p:nvSpPr>
+        <p:spPr/>
+        <p:txBody>
+          <a:bodyPr/>
+          <a:lstStyle/>
+          <a:p>
+            <a:fld id="{8F934565-9092-4BA3-AD6F-09DA969FA889}" type="datetime1">
+              <a:rPr kumimoji="1" lang="ja-JP" altLang="en-US" smtClean="0"/>
+              <a:t>2026/7/21</a:t>
+            </a:fld>
+            <a:endParaRPr kumimoji="1" lang="ja-JP" altLang="en-US"/>
+          </a:p>
+        </p:txBody>
+      </p:sp>
+      <p:sp>
+        <p:nvSpPr>
+          <p:cNvPr id="5" name="フッター プレースホルダー 4">
+            <a:extLst>
+              <a:ext uri="{FF2B5EF4-FFF2-40B4-BE49-F238E27FC236}">
+                <a16:creationId xmlns:a16="http://schemas.microsoft.com/office/drawing/2014/main" id="{D9185F3F-0D09-F616-9366-64F90E7400D8}"/>
+              </a:ext>
+            </a:extLst>
+          </p:cNvPr>
+          <p:cNvSpPr>
+            <a:spLocks noGrp="1"/>
+          </p:cNvSpPr>
+          <p:nvPr>
+            <p:ph type="ftr" sz="quarter" idx="11"/>
+          </p:nvPr>
+        </p:nvSpPr>
+        <p:spPr/>
+        <p:txBody>
+          <a:bodyPr/>
+          <a:lstStyle/>
+          <a:p>
+            <a:endParaRPr kumimoji="1" lang="ja-JP" altLang="en-US" sz="1800"/>
+          </a:p>
+        </p:txBody>
+      </p:sp>
+      <p:sp>
+        <p:nvSpPr>
+          <p:cNvPr id="6" name="スライド番号プレースホルダー 5">
+            <a:extLst>
+              <a:ext uri="{FF2B5EF4-FFF2-40B4-BE49-F238E27FC236}">
+                <a16:creationId xmlns:a16="http://schemas.microsoft.com/office/drawing/2014/main" id="{82F13621-FB80-C47A-DB61-CCA61F06ADA7}"/>
+              </a:ext>
+            </a:extLst>
+          </p:cNvPr>
+          <p:cNvSpPr>
+            <a:spLocks noGrp="1"/>
+          </p:cNvSpPr>
+          <p:nvPr>
+            <p:ph type="sldNum" sz="quarter" idx="12"/>
+          </p:nvPr>
+        </p:nvSpPr>
+        <p:spPr/>
+        <p:txBody>
+          <a:bodyPr/>
+          <a:lstStyle/>
+          <a:p>
+            <a:fld id="{51592508-002E-4DCC-ABEF-C612A1506DC4}" type="slidenum">
+              <a:rPr kumimoji="1" lang="ja-JP" altLang="en-US" smtClean="0"/>
+              <a:t>5</a:t>
+            </a:fld>
+            <a:endParaRPr kumimoji="1" lang="ja-JP" altLang="en-US"/>
+          </a:p>
+        </p:txBody>
+      </p:sp>
+    </p:spTree>
+    <p:extLst>
+      <p:ext uri="{BB962C8B-B14F-4D97-AF65-F5344CB8AC3E}">
+        <p14:creationId xmlns:p14="http://schemas.microsoft.com/office/powerpoint/2010/main" val="746129897"/>
       </p:ext>
     </p:extLst>
   </p:cSld>
@@ -8307,6 +8529,15 @@
 </file>
 
 <file path=customXml/item2.xml><?xml version="1.0" encoding="utf-8"?>
+<?mso-contentType ?>
+<FormTemplates xmlns="http://schemas.microsoft.com/sharepoint/v3/contenttype/forms">
+  <Display>DocumentLibraryForm</Display>
+  <Edit>DocumentLibraryForm</Edit>
+  <New>DocumentLibraryForm</New>
+</FormTemplates>
+</file>
+
+<file path=customXml/item3.xml><?xml version="1.0" encoding="utf-8"?>
 <ct:contentTypeSchema xmlns:ct="http://schemas.microsoft.com/office/2006/metadata/contentType" xmlns:ma="http://schemas.microsoft.com/office/2006/metadata/properties/metaAttributes" ct:_="" ma:_="" ma:contentTypeName="ドキュメント" ma:contentTypeID="0x010100F0BF34DA9A9AB14A9F7AC31FBE37F9E5" ma:contentTypeVersion="16" ma:contentTypeDescription="新しいドキュメントを作成します。" ma:contentTypeScope="" ma:versionID="32dd7207e8140c2c126537d3c2fd37c5">
   <xsd:schema xmlns:xsd="http://www.w3.org/2001/XMLSchema" xmlns:xs="http://www.w3.org/2001/XMLSchema" xmlns:p="http://schemas.microsoft.com/office/2006/metadata/properties" xmlns:ns2="7423ae4f-c4e8-48bd-a156-3a6ed64ee840" xmlns:ns3="2fc92963-ec3a-4730-8ea3-7221b6caf362" targetNamespace="http://schemas.microsoft.com/office/2006/metadata/properties" ma:root="true" ma:fieldsID="f3879058c32170438aed5fb3d384d5ad" ns2:_="" ns3:_="">
     <xsd:import namespace="7423ae4f-c4e8-48bd-a156-3a6ed64ee840"/>
@@ -8547,15 +8778,6 @@
 </ct:contentTypeSchema>
 </file>
 
-<file path=customXml/item3.xml><?xml version="1.0" encoding="utf-8"?>
-<?mso-contentType ?>
-<FormTemplates xmlns="http://schemas.microsoft.com/sharepoint/v3/contenttype/forms">
-  <Display>DocumentLibraryForm</Display>
-  <Edit>DocumentLibraryForm</Edit>
-  <New>DocumentLibraryForm</New>
-</FormTemplates>
-</file>
-
 <file path=customXml/itemProps1.xml><?xml version="1.0" encoding="utf-8"?>
 <ds:datastoreItem xmlns:ds="http://schemas.openxmlformats.org/officeDocument/2006/customXml" ds:itemID="{F6D09FDB-9868-44A6-A96C-0C66C7078369}">
   <ds:schemaRefs>
@@ -8574,6 +8796,14 @@
 </file>
 
 <file path=customXml/itemProps2.xml><?xml version="1.0" encoding="utf-8"?>
+<ds:datastoreItem xmlns:ds="http://schemas.openxmlformats.org/officeDocument/2006/customXml" ds:itemID="{DBF5F6B8-8CA8-42FC-ABA9-1599493B6861}">
+  <ds:schemaRefs>
+    <ds:schemaRef ds:uri="http://schemas.microsoft.com/sharepoint/v3/contenttype/forms"/>
+  </ds:schemaRefs>
+</ds:datastoreItem>
+</file>
+
+<file path=customXml/itemProps3.xml><?xml version="1.0" encoding="utf-8"?>
 <ds:datastoreItem xmlns:ds="http://schemas.openxmlformats.org/officeDocument/2006/customXml" ds:itemID="{9234AE58-1F37-44BE-8BCC-BD47CBB6D0E8}">
   <ds:schemaRefs>
     <ds:schemaRef ds:uri="http://schemas.microsoft.com/office/2006/metadata/contentType"/>
@@ -8592,14 +8822,6 @@
 </ds:datastoreItem>
 </file>
 
-<file path=customXml/itemProps3.xml><?xml version="1.0" encoding="utf-8"?>
-<ds:datastoreItem xmlns:ds="http://schemas.openxmlformats.org/officeDocument/2006/customXml" ds:itemID="{DBF5F6B8-8CA8-42FC-ABA9-1599493B6861}">
-  <ds:schemaRefs>
-    <ds:schemaRef ds:uri="http://schemas.microsoft.com/sharepoint/v3/contenttype/forms"/>
-  </ds:schemaRefs>
-</ds:datastoreItem>
-</file>
-
 <file path=docMetadata/LabelInfo.xml><?xml version="1.0" encoding="utf-8"?>
 <clbl:labelList xmlns:clbl="http://schemas.microsoft.com/office/2020/mipLabelMetadata">
   <clbl:label id="{46ec3f30-2d4f-4250-82e1-372410d23208}" enabled="0" method="" siteId="{46ec3f30-2d4f-4250-82e1-372410d23208}" removed="1"/>
